--- a/public/fun/pack/pptx/birthdaypro/돌잔치프리미엄_36_성장기록중심_앰버스모크.pptx
+++ b/public/fun/pack/pptx/birthdaypro/돌잔치프리미엄_36_성장기록중심_앰버스모크.pptx
@@ -112,12 +112,12 @@
   <p:extLst>
     <p:ext uri="{521415D9-36F7-43E2-AB2F-B90AF26B5E84}">
       <p14:sectionLst xmlns:p14="http://schemas.microsoft.com/office/powerpoint/2010/main">
-        <p14:section name="시작" id="{62DC7590-FCF9-43D7-B936-7906E5D7AAD6}">
+        <p14:section name="시작" id="{37FFB590-52BE-4783-AEBF-05D1778388BA}">
           <p14:sldIdLst>
             <p14:sldId id="256"/>
           </p14:sldIdLst>
         </p14:section>
-        <p14:section name="본문" id="{C2591EA1-D1F0-465F-A2C9-85CD989C6F0E}">
+        <p14:section name="본문" id="{67366DC0-7C11-49FB-9AAE-F66F2C66DA33}">
           <p14:sldIdLst>
             <p14:sldId id="257"/>
             <p14:sldId id="258"/>
@@ -125,7 +125,7 @@
             <p14:sldId id="260"/>
           </p14:sldIdLst>
         </p14:section>
-        <p14:section name="마무리" id="{93FD058C-44EF-43A8-9F5B-63076427E77A}">
+        <p14:section name="마무리" id="{02F13D37-A7BA-416F-A07A-40CB73CA3539}">
           <p14:sldIdLst>
             <p14:sldId id="261"/>
           </p14:sldIdLst>
@@ -2981,7 +2981,7 @@
             </a:lvl1pPr>
           </a:lstStyle>
           <a:p>
-            <a:fld id="{28C9E50C-C19B-4624-A78C-FFA3A9F4C4F9}" type="slidenum">
+            <a:fld id="{CCEF4181-8220-46A9-9901-D381D69D3601}" type="slidenum">
               <a:rPr lang="en-US"/>
               <a:t>‹#›</a:t>
             </a:fld>
@@ -4957,7 +4957,7 @@
             </a:lvl1pPr>
           </a:lstStyle>
           <a:p>
-            <a:fld id="{29FDCB71-695C-4D61-9184-878C2FDBDC81}" type="slidenum">
+            <a:fld id="{6F5A37C3-A1AF-43C3-AB33-AADA97B4C210}" type="slidenum">
               <a:rPr lang="en-US"/>
               <a:t>‹#›</a:t>
             </a:fld>
@@ -5583,7 +5583,7 @@
             </a:lvl1pPr>
           </a:lstStyle>
           <a:p>
-            <a:fld id="{3E2A23F4-C25F-4074-BF1C-AC412382057D}" type="slidenum">
+            <a:fld id="{F89824A5-7DD9-4149-8035-D4A5446DC54C}" type="slidenum">
               <a:rPr lang="en-US"/>
               <a:t>‹#›</a:t>
             </a:fld>
@@ -6436,7 +6436,7 @@
           <a:p>
             <a:r>
               <a:rPr lang="ko-KR"/>
-              <a:t>아기 이름 · 0000. 00. 00</a:t>
+              <a:t>아기 이름 · 날짜 입력</a:t>
             </a:r>
           </a:p>
           <a:p>
@@ -6596,7 +6596,7 @@
           <a:bodyPr/>
           <a:lstStyle/>
           <a:p>
-            <a:fld id="{FE4BB3F9-0A93-494B-91C6-B9FCE97B8FBE}" type="slidenum">
+            <a:fld id="{169BB6D9-EC55-449F-B04B-04CA46B5C595}" type="slidenum">
               <a:rPr lang="en-US"/>
               <a:t>‹#›</a:t>
             </a:fld>
@@ -7196,7 +7196,7 @@
           <a:bodyPr/>
           <a:lstStyle/>
           <a:p>
-            <a:fld id="{681C53DC-29E4-476B-AC71-C36D7F6C71C3}" type="slidenum">
+            <a:fld id="{A11046A0-7F3C-4432-9A34-51233ED291EE}" type="slidenum">
               <a:rPr lang="en-US"/>
               <a:t>‹#›</a:t>
             </a:fld>
@@ -8216,7 +8216,7 @@
           <a:bodyPr/>
           <a:lstStyle/>
           <a:p>
-            <a:fld id="{A6583283-7434-4F94-9E43-F20C83428039}" type="slidenum">
+            <a:fld id="{60E40C39-7C57-49B8-B329-957907CD1DA0}" type="slidenum">
               <a:rPr lang="en-US"/>
               <a:t>‹#›</a:t>
             </a:fld>
@@ -8882,7 +8882,7 @@
           <a:bodyPr/>
           <a:lstStyle/>
           <a:p>
-            <a:fld id="{FBC33542-F7BC-4B33-8C5D-3597E309472D}" type="slidenum">
+            <a:fld id="{F96A762E-A13B-46F3-B39C-8540CA422646}" type="slidenum">
               <a:rPr lang="en-US"/>
               <a:t>‹#›</a:t>
             </a:fld>
